--- a/3-Master_Plan/re_entry/HEROs_and_PASSes/slides/auto/CHAR_grandchild_h_sort_explainer_AUTO.pptx
+++ b/3-Master_Plan/re_entry/HEROs_and_PASSes/slides/auto/CHAR_grandchild_h_sort_explainer_AUTO.pptx
@@ -3145,7 +3145,7 @@
               <a:rPr sz="1000" b="0" i="0" baseline="0">
                 <a:latin typeface="Calibri"/>
               </a:rPr>
-              <a:t>Realized sorting index · Grandchild / PD17 · alias \texttt{sorting\_index\_h} in code</a:t>
+              <a:t>Realized sorting index · LG / PD17 · alias \texttt{sorting\_index\_h} in code</a:t>
             </a:r>
           </a:p>
         </p:txBody>
@@ -3368,7 +3368,7 @@
               <a:rPr sz="1000" b="0" i="0" baseline="0">
                 <a:latin typeface="Calibri"/>
               </a:rPr>
-              <a:t>  \rho \uparrow \Rightarrow H_{sort} \uparrow in Grandchild sweep (see inset plot).</a:t>
+              <a:t>  \rho \uparrow \Rightarrow H_{sort} \uparrow in LG sweep (see inset plot).</a:t>
             </a:r>
           </a:p>
           <a:p>
